--- a/classes/parte-4-seguridad-de-aplicaciones-web/105-control-de-acceso-roto-idor-y-path-traversal/clase-105-presentacion.pptx
+++ b/classes/parte-4-seguridad-de-aplicaciones-web/105-control-de-acceso-roto-idor-y-path-traversal/clase-105-presentacion.pptx
@@ -17,6 +17,9 @@
     <p:sldId id="265" r:id="rId16"/>
     <p:sldId id="266" r:id="rId17"/>
     <p:sldId id="267" r:id="rId18"/>
+    <p:sldId id="268" r:id="rId19"/>
+    <p:sldId id="269" r:id="rId20"/>
+    <p:sldId id="270" r:id="rId21"/>
   </p:sldIdLst>
   <p:sldSz cx="9144000" cy="6858000" type="screen4x3"/>
   <p:notesSz cx="6858000" cy="9144000"/>
@@ -3198,7 +3201,7 @@
                   <a:srgbClr val="0B3D2E"/>
                 </a:solidFill>
               </a:rPr>
-              <a:t>⚠️ Errores comunes</a:t>
+              <a:t>✍️ Ejercicios</a:t>
             </a:r>
           </a:p>
         </p:txBody>
@@ -3236,67 +3239,82 @@
                   <a:srgbClr val="22282E"/>
                 </a:solidFill>
               </a:rPr>
-              <a:t>•  Cambiar el ID da 403 — Hay control de acceso; busca otro objeto/verbo</a:t>
-            </a:r>
-          </a:p>
-          <a:p>
-            <a:pPr>
-              <a:spcAft>
-                <a:spcPts val="600"/>
-              </a:spcAft>
-            </a:pPr>
-            <a:r>
-              <a:rPr sz="1500">
-                <a:solidFill>
-                  <a:srgbClr val="22282E"/>
-                </a:solidFill>
-              </a:rPr>
-              <a:t>•  UUID "imposible de adivinar" — Suele filtrarse en otra respuesta; búscalo</a:t>
-            </a:r>
-          </a:p>
-          <a:p>
-            <a:pPr>
-              <a:spcAft>
-                <a:spcPts val="600"/>
-              </a:spcAft>
-            </a:pPr>
-            <a:r>
-              <a:rPr sz="1500">
-                <a:solidFill>
-                  <a:srgbClr val="22282E"/>
-                </a:solidFill>
-              </a:rPr>
-              <a:t>•  ../ filtrado — Prueba encoding, doble encoding o rutas absolutas</a:t>
-            </a:r>
-          </a:p>
-          <a:p>
-            <a:pPr>
-              <a:spcAft>
-                <a:spcPts val="600"/>
-              </a:spcAft>
-            </a:pPr>
-            <a:r>
-              <a:rPr sz="1500">
-                <a:solidFill>
-                  <a:srgbClr val="22282E"/>
-                </a:solidFill>
-              </a:rPr>
-              <a:t>•  Admin accesible pero vacío — Falta el rol; prueba acciones concretas</a:t>
-            </a:r>
-          </a:p>
-          <a:p>
-            <a:pPr>
-              <a:spcAft>
-                <a:spcPts val="600"/>
-              </a:spcAft>
-            </a:pPr>
-            <a:r>
-              <a:rPr sz="1500">
-                <a:solidFill>
-                  <a:srgbClr val="22282E"/>
-                </a:solidFill>
-              </a:rPr>
-              <a:t>•  Falso IDOR — Confirma con dos cuentas distintas</a:t>
+              <a:t>•  Diferencia con ejemplos IDOR horizontal y escalada vertical.</a:t>
+            </a:r>
+          </a:p>
+          <a:p>
+            <a:pPr>
+              <a:spcAft>
+                <a:spcPts val="600"/>
+              </a:spcAft>
+            </a:pPr>
+            <a:r>
+              <a:rPr sz="1500">
+                <a:solidFill>
+                  <a:srgbClr val="22282E"/>
+                </a:solidFill>
+              </a:rPr>
+              <a:t>•  Explota un IDOR donde el identificador es un UUID (busca la fuente del UUID).</a:t>
+            </a:r>
+          </a:p>
+          <a:p>
+            <a:pPr>
+              <a:spcAft>
+                <a:spcPts val="600"/>
+              </a:spcAft>
+            </a:pPr>
+            <a:r>
+              <a:rPr sz="1500">
+                <a:solidFill>
+                  <a:srgbClr val="22282E"/>
+                </a:solidFill>
+              </a:rPr>
+              <a:t>•  Lee /etc/passwd vía path traversal evadiendo un filtro de ../.</a:t>
+            </a:r>
+          </a:p>
+          <a:p>
+            <a:pPr>
+              <a:spcAft>
+                <a:spcPts val="600"/>
+              </a:spcAft>
+            </a:pPr>
+            <a:r>
+              <a:rPr sz="1500">
+                <a:solidFill>
+                  <a:srgbClr val="22282E"/>
+                </a:solidFill>
+              </a:rPr>
+              <a:t>•  Descubre una función admin por forced browsing.</a:t>
+            </a:r>
+          </a:p>
+          <a:p>
+            <a:pPr>
+              <a:spcAft>
+                <a:spcPts val="600"/>
+              </a:spcAft>
+            </a:pPr>
+            <a:r>
+              <a:rPr sz="1500">
+                <a:solidFill>
+                  <a:srgbClr val="22282E"/>
+                </a:solidFill>
+              </a:rPr>
+              <a:t>•  Prueba cambiar el verbo HTTP (GET→POST/PUT) para saltar un control.</a:t>
+            </a:r>
+          </a:p>
+          <a:p>
+            <a:pPr>
+              <a:spcAft>
+                <a:spcPts val="600"/>
+              </a:spcAft>
+            </a:pPr>
+            <a:r>
+              <a:rPr sz="1500">
+                <a:solidFill>
+                  <a:srgbClr val="22282E"/>
+                </a:solidFill>
+              </a:rPr>
+              <a:t>•  Escribe el control de acceso correcto a nivel de objeto (comprobar propietario).</a:t>
             </a:r>
           </a:p>
         </p:txBody>
@@ -3347,7 +3365,7 @@
                   <a:srgbClr val="0B3D2E"/>
                 </a:solidFill>
               </a:rPr>
-              <a:t>❓ Preguntas frecuentes</a:t>
+              <a:t>📝 Reto verificable</a:t>
             </a:r>
           </a:p>
         </p:txBody>
@@ -3385,82 +3403,22 @@
                   <a:srgbClr val="22282E"/>
                 </a:solidFill>
               </a:rPr>
-              <a:t>•  ❓ ¿Por qué IDOR es tan común?</a:t>
-            </a:r>
-          </a:p>
-          <a:p>
-            <a:pPr>
-              <a:spcAft>
-                <a:spcPts val="600"/>
-              </a:spcAft>
-            </a:pPr>
-            <a:r>
-              <a:rPr sz="1500">
-                <a:solidFill>
-                  <a:srgbClr val="22282E"/>
-                </a:solidFill>
-              </a:rPr>
-              <a:t>•  Porque los desarrolladores confían en que el ID no es adivinable, en vez de verificar la propiedad del objeto en cada petición.</a:t>
-            </a:r>
-          </a:p>
-          <a:p>
-            <a:pPr>
-              <a:spcAft>
-                <a:spcPts val="600"/>
-              </a:spcAft>
-            </a:pPr>
-            <a:r>
-              <a:rPr sz="1500">
-                <a:solidFill>
-                  <a:srgbClr val="22282E"/>
-                </a:solidFill>
-              </a:rPr>
-              <a:t>•  ❓ ¿Los UUID previenen IDOR?</a:t>
-            </a:r>
-          </a:p>
-          <a:p>
-            <a:pPr>
-              <a:spcAft>
-                <a:spcPts val="600"/>
-              </a:spcAft>
-            </a:pPr>
-            <a:r>
-              <a:rPr sz="1500">
-                <a:solidFill>
-                  <a:srgbClr val="22282E"/>
-                </a:solidFill>
-              </a:rPr>
-              <a:t>•  Dificultan la adivinación, pero no son control de acceso. Si el UUID se filtra, el IDOR persiste.</a:t>
-            </a:r>
-          </a:p>
-          <a:p>
-            <a:pPr>
-              <a:spcAft>
-                <a:spcPts val="600"/>
-              </a:spcAft>
-            </a:pPr>
-            <a:r>
-              <a:rPr sz="1500">
-                <a:solidFill>
-                  <a:srgbClr val="22282E"/>
-                </a:solidFill>
-              </a:rPr>
-              <a:t>•  ❓ ¿Path traversal solo lee archivos?</a:t>
-            </a:r>
-          </a:p>
-          <a:p>
-            <a:pPr>
-              <a:spcAft>
-                <a:spcPts val="600"/>
-              </a:spcAft>
-            </a:pPr>
-            <a:r>
-              <a:rPr sz="1500">
-                <a:solidFill>
-                  <a:srgbClr val="22282E"/>
-                </a:solidFill>
-              </a:rPr>
-              <a:t>•  Leer es lo básico; combinado con upload o LFI puede escalar a ejecución de código en algunos contextos.</a:t>
+              <a:t>•  Resuelve dos labs de PortSwigger: un IDOR que exponga datos de otro usuario y un path traversal que lea un archivo del sistema.</a:t>
+            </a:r>
+          </a:p>
+          <a:p>
+            <a:pPr>
+              <a:spcAft>
+                <a:spcPts val="600"/>
+              </a:spcAft>
+            </a:pPr>
+            <a:r>
+              <a:rPr sz="1500">
+                <a:solidFill>
+                  <a:srgbClr val="22282E"/>
+                </a:solidFill>
+              </a:rPr>
+              <a:t>•  Criterio de aceptación: ambos labs quedan resueltos, documentas el identificador/ruta manipulados, la evidencia del acceso no autorizado y la defensa (authz por objeto, canonicalización de rutas).</a:t>
             </a:r>
           </a:p>
         </p:txBody>
@@ -3511,7 +3469,7 @@
                   <a:srgbClr val="0B3D2E"/>
                 </a:solidFill>
               </a:rPr>
-              <a:t>🔗 Referencias</a:t>
+              <a:t>⚠️ Errores comunes</a:t>
             </a:r>
           </a:p>
         </p:txBody>
@@ -3549,6 +3507,319 @@
                   <a:srgbClr val="22282E"/>
                 </a:solidFill>
               </a:rPr>
+              <a:t>•  Cambiar el ID da 403 — Hay control de acceso; busca otro objeto/verbo</a:t>
+            </a:r>
+          </a:p>
+          <a:p>
+            <a:pPr>
+              <a:spcAft>
+                <a:spcPts val="600"/>
+              </a:spcAft>
+            </a:pPr>
+            <a:r>
+              <a:rPr sz="1500">
+                <a:solidFill>
+                  <a:srgbClr val="22282E"/>
+                </a:solidFill>
+              </a:rPr>
+              <a:t>•  UUID "imposible de adivinar" — Suele filtrarse en otra respuesta; búscalo</a:t>
+            </a:r>
+          </a:p>
+          <a:p>
+            <a:pPr>
+              <a:spcAft>
+                <a:spcPts val="600"/>
+              </a:spcAft>
+            </a:pPr>
+            <a:r>
+              <a:rPr sz="1500">
+                <a:solidFill>
+                  <a:srgbClr val="22282E"/>
+                </a:solidFill>
+              </a:rPr>
+              <a:t>•  ../ filtrado — Prueba encoding, doble encoding o rutas absolutas</a:t>
+            </a:r>
+          </a:p>
+          <a:p>
+            <a:pPr>
+              <a:spcAft>
+                <a:spcPts val="600"/>
+              </a:spcAft>
+            </a:pPr>
+            <a:r>
+              <a:rPr sz="1500">
+                <a:solidFill>
+                  <a:srgbClr val="22282E"/>
+                </a:solidFill>
+              </a:rPr>
+              <a:t>•  Admin accesible pero vacío — Falta el rol; prueba acciones concretas</a:t>
+            </a:r>
+          </a:p>
+          <a:p>
+            <a:pPr>
+              <a:spcAft>
+                <a:spcPts val="600"/>
+              </a:spcAft>
+            </a:pPr>
+            <a:r>
+              <a:rPr sz="1500">
+                <a:solidFill>
+                  <a:srgbClr val="22282E"/>
+                </a:solidFill>
+              </a:rPr>
+              <a:t>•  Falso IDOR — Confirma con dos cuentas distintas</a:t>
+            </a:r>
+          </a:p>
+        </p:txBody>
+      </p:sp>
+    </p:spTree>
+  </p:cSld>
+  <p:clrMapOvr>
+    <a:masterClrMapping/>
+  </p:clrMapOvr>
+</p:sld>
+</file>
+
+<file path=ppt/slides/slide13.xml><?xml version="1.0" encoding="utf-8"?>
+<p:sld xmlns:a="http://schemas.openxmlformats.org/drawingml/2006/main" xmlns:p="http://schemas.openxmlformats.org/presentationml/2006/main" xmlns:r="http://schemas.openxmlformats.org/officeDocument/2006/relationships">
+  <p:cSld>
+    <p:spTree>
+      <p:nvGrpSpPr>
+        <p:cNvPr id="1" name=""/>
+        <p:cNvGrpSpPr/>
+        <p:nvPr/>
+      </p:nvGrpSpPr>
+      <p:grpSpPr/>
+      <p:sp>
+        <p:nvSpPr>
+          <p:cNvPr id="2" name="TextBox 1"/>
+          <p:cNvSpPr txBox="1"/>
+          <p:nvPr/>
+        </p:nvSpPr>
+        <p:spPr>
+          <a:xfrm>
+            <a:off x="457200" y="320040"/>
+            <a:ext cx="8229600" cy="822960"/>
+          </a:xfrm>
+          <a:prstGeom prst="rect">
+            <a:avLst/>
+          </a:prstGeom>
+          <a:noFill/>
+        </p:spPr>
+        <p:txBody>
+          <a:bodyPr wrap="square">
+            <a:spAutoFit/>
+          </a:bodyPr>
+          <a:lstStyle/>
+          <a:p>
+            <a:r>
+              <a:rPr sz="2600" b="1">
+                <a:solidFill>
+                  <a:srgbClr val="0B3D2E"/>
+                </a:solidFill>
+              </a:rPr>
+              <a:t>❓ Preguntas frecuentes</a:t>
+            </a:r>
+          </a:p>
+        </p:txBody>
+      </p:sp>
+      <p:sp>
+        <p:nvSpPr>
+          <p:cNvPr id="3" name="TextBox 2"/>
+          <p:cNvSpPr txBox="1"/>
+          <p:nvPr/>
+        </p:nvSpPr>
+        <p:spPr>
+          <a:xfrm>
+            <a:off x="457200" y="1280160"/>
+            <a:ext cx="8229600" cy="4937760"/>
+          </a:xfrm>
+          <a:prstGeom prst="rect">
+            <a:avLst/>
+          </a:prstGeom>
+          <a:noFill/>
+        </p:spPr>
+        <p:txBody>
+          <a:bodyPr wrap="square">
+            <a:spAutoFit/>
+          </a:bodyPr>
+          <a:lstStyle/>
+          <a:p>
+            <a:pPr>
+              <a:spcAft>
+                <a:spcPts val="600"/>
+              </a:spcAft>
+            </a:pPr>
+            <a:r>
+              <a:rPr sz="1500">
+                <a:solidFill>
+                  <a:srgbClr val="22282E"/>
+                </a:solidFill>
+              </a:rPr>
+              <a:t>•  ❓ ¿Por qué IDOR es tan común?</a:t>
+            </a:r>
+          </a:p>
+          <a:p>
+            <a:pPr>
+              <a:spcAft>
+                <a:spcPts val="600"/>
+              </a:spcAft>
+            </a:pPr>
+            <a:r>
+              <a:rPr sz="1500">
+                <a:solidFill>
+                  <a:srgbClr val="22282E"/>
+                </a:solidFill>
+              </a:rPr>
+              <a:t>•  Porque los desarrolladores confían en que el ID no es adivinable, en vez de verificar la propiedad del objeto en cada petición.</a:t>
+            </a:r>
+          </a:p>
+          <a:p>
+            <a:pPr>
+              <a:spcAft>
+                <a:spcPts val="600"/>
+              </a:spcAft>
+            </a:pPr>
+            <a:r>
+              <a:rPr sz="1500">
+                <a:solidFill>
+                  <a:srgbClr val="22282E"/>
+                </a:solidFill>
+              </a:rPr>
+              <a:t>•  ❓ ¿Los UUID previenen IDOR?</a:t>
+            </a:r>
+          </a:p>
+          <a:p>
+            <a:pPr>
+              <a:spcAft>
+                <a:spcPts val="600"/>
+              </a:spcAft>
+            </a:pPr>
+            <a:r>
+              <a:rPr sz="1500">
+                <a:solidFill>
+                  <a:srgbClr val="22282E"/>
+                </a:solidFill>
+              </a:rPr>
+              <a:t>•  Dificultan la adivinación, pero no son control de acceso. Si el UUID se filtra, el IDOR persiste.</a:t>
+            </a:r>
+          </a:p>
+          <a:p>
+            <a:pPr>
+              <a:spcAft>
+                <a:spcPts val="600"/>
+              </a:spcAft>
+            </a:pPr>
+            <a:r>
+              <a:rPr sz="1500">
+                <a:solidFill>
+                  <a:srgbClr val="22282E"/>
+                </a:solidFill>
+              </a:rPr>
+              <a:t>•  ❓ ¿Path traversal solo lee archivos?</a:t>
+            </a:r>
+          </a:p>
+          <a:p>
+            <a:pPr>
+              <a:spcAft>
+                <a:spcPts val="600"/>
+              </a:spcAft>
+            </a:pPr>
+            <a:r>
+              <a:rPr sz="1500">
+                <a:solidFill>
+                  <a:srgbClr val="22282E"/>
+                </a:solidFill>
+              </a:rPr>
+              <a:t>•  Leer es lo básico; combinado con upload o LFI puede escalar a ejecución de código en algunos contextos.</a:t>
+            </a:r>
+          </a:p>
+        </p:txBody>
+      </p:sp>
+    </p:spTree>
+  </p:cSld>
+  <p:clrMapOvr>
+    <a:masterClrMapping/>
+  </p:clrMapOvr>
+</p:sld>
+</file>
+
+<file path=ppt/slides/slide14.xml><?xml version="1.0" encoding="utf-8"?>
+<p:sld xmlns:a="http://schemas.openxmlformats.org/drawingml/2006/main" xmlns:p="http://schemas.openxmlformats.org/presentationml/2006/main" xmlns:r="http://schemas.openxmlformats.org/officeDocument/2006/relationships">
+  <p:cSld>
+    <p:spTree>
+      <p:nvGrpSpPr>
+        <p:cNvPr id="1" name=""/>
+        <p:cNvGrpSpPr/>
+        <p:nvPr/>
+      </p:nvGrpSpPr>
+      <p:grpSpPr/>
+      <p:sp>
+        <p:nvSpPr>
+          <p:cNvPr id="2" name="TextBox 1"/>
+          <p:cNvSpPr txBox="1"/>
+          <p:nvPr/>
+        </p:nvSpPr>
+        <p:spPr>
+          <a:xfrm>
+            <a:off x="457200" y="320040"/>
+            <a:ext cx="8229600" cy="822960"/>
+          </a:xfrm>
+          <a:prstGeom prst="rect">
+            <a:avLst/>
+          </a:prstGeom>
+          <a:noFill/>
+        </p:spPr>
+        <p:txBody>
+          <a:bodyPr wrap="square">
+            <a:spAutoFit/>
+          </a:bodyPr>
+          <a:lstStyle/>
+          <a:p>
+            <a:r>
+              <a:rPr sz="2600" b="1">
+                <a:solidFill>
+                  <a:srgbClr val="0B3D2E"/>
+                </a:solidFill>
+              </a:rPr>
+              <a:t>🔗 Referencias</a:t>
+            </a:r>
+          </a:p>
+        </p:txBody>
+      </p:sp>
+      <p:sp>
+        <p:nvSpPr>
+          <p:cNvPr id="3" name="TextBox 2"/>
+          <p:cNvSpPr txBox="1"/>
+          <p:nvPr/>
+        </p:nvSpPr>
+        <p:spPr>
+          <a:xfrm>
+            <a:off x="457200" y="1280160"/>
+            <a:ext cx="8229600" cy="4937760"/>
+          </a:xfrm>
+          <a:prstGeom prst="rect">
+            <a:avLst/>
+          </a:prstGeom>
+          <a:noFill/>
+        </p:spPr>
+        <p:txBody>
+          <a:bodyPr wrap="square">
+            <a:spAutoFit/>
+          </a:bodyPr>
+          <a:lstStyle/>
+          <a:p>
+            <a:pPr>
+              <a:spcAft>
+                <a:spcPts val="600"/>
+              </a:spcAft>
+            </a:pPr>
+            <a:r>
+              <a:rPr sz="1500">
+                <a:solidFill>
+                  <a:srgbClr val="22282E"/>
+                </a:solidFill>
+              </a:rPr>
               <a:t>•  Yaworski, Real-World Bug Hunting, cap. de IDOR.</a:t>
             </a:r>
           </a:p>
@@ -3599,6 +3870,81 @@
           </a:p>
         </p:txBody>
       </p:sp>
+    </p:spTree>
+  </p:cSld>
+  <p:clrMapOvr>
+    <a:masterClrMapping/>
+  </p:clrMapOvr>
+</p:sld>
+</file>
+
+<file path=ppt/slides/slide15.xml><?xml version="1.0" encoding="utf-8"?>
+<p:sld xmlns:a="http://schemas.openxmlformats.org/drawingml/2006/main" xmlns:p="http://schemas.openxmlformats.org/presentationml/2006/main" xmlns:r="http://schemas.openxmlformats.org/officeDocument/2006/relationships">
+  <p:cSld>
+    <p:spTree>
+      <p:nvGrpSpPr>
+        <p:cNvPr id="1" name=""/>
+        <p:cNvGrpSpPr/>
+        <p:nvPr/>
+      </p:nvGrpSpPr>
+      <p:grpSpPr/>
+      <p:sp>
+        <p:nvSpPr>
+          <p:cNvPr id="2" name="TextBox 1"/>
+          <p:cNvSpPr txBox="1"/>
+          <p:nvPr/>
+        </p:nvSpPr>
+        <p:spPr>
+          <a:xfrm>
+            <a:off x="457200" y="274320"/>
+            <a:ext cx="8229600" cy="640080"/>
+          </a:xfrm>
+          <a:prstGeom prst="rect">
+            <a:avLst/>
+          </a:prstGeom>
+          <a:noFill/>
+        </p:spPr>
+        <p:txBody>
+          <a:bodyPr wrap="square">
+            <a:spAutoFit/>
+          </a:bodyPr>
+          <a:lstStyle/>
+          <a:p>
+            <a:r>
+              <a:rPr sz="2200" b="1">
+                <a:solidFill>
+                  <a:srgbClr val="0B3D2E"/>
+                </a:solidFill>
+              </a:rPr>
+              <a:t>Diagrama de la clase</a:t>
+            </a:r>
+          </a:p>
+        </p:txBody>
+      </p:sp>
+      <p:pic>
+        <p:nvPicPr>
+          <p:cNvPr id="3" name="Picture 2" descr="47b5e83c142ae3a8.png"/>
+          <p:cNvPicPr>
+            <a:picLocks noChangeAspect="1"/>
+          </p:cNvPicPr>
+          <p:nvPr/>
+        </p:nvPicPr>
+        <p:blipFill>
+          <a:blip r:embed="rId2"/>
+          <a:stretch>
+            <a:fillRect/>
+          </a:stretch>
+        </p:blipFill>
+        <p:spPr>
+          <a:xfrm>
+            <a:off x="900332" y="1097280"/>
+            <a:ext cx="7343335" cy="5303520"/>
+          </a:xfrm>
+          <a:prstGeom prst="rect">
+            <a:avLst/>
+          </a:prstGeom>
+        </p:spPr>
+      </p:pic>
     </p:spTree>
   </p:cSld>
   <p:clrMapOvr>
@@ -3683,7 +4029,7 @@
                   <a:srgbClr val="22282E"/>
                 </a:solidFill>
               </a:rPr>
-              <a:t>•  Explotar el control de acceso roto (Broken Access Control), la categoría número 1 del OWASP Top 10. Nos centramos en IDOR (referencias directas inseguras a objetos) y path traversal (acceso a archivos fuera del directorio permitido), dos de los hallazgos más frecuentes y rentables en bug bounty.</a:t>
+              <a:t>•  Explotar el control de acceso roto (Broken Access Control), la categoría número 1 del OWASP Top 10. Nos centramos en IDOR (referencias directas inseguras a objetos) y path traversal (acceso a…</a:t>
             </a:r>
           </a:p>
         </p:txBody>
@@ -4077,7 +4423,7 @@
                   <a:srgbClr val="0B3D2E"/>
                 </a:solidFill>
               </a:rPr>
-              <a:t>📖 Definiciones y características</a:t>
+              <a:t>🧠 Explicación en profundidad</a:t>
             </a:r>
           </a:p>
         </p:txBody>
@@ -4115,82 +4461,97 @@
                   <a:srgbClr val="22282E"/>
                 </a:solidFill>
               </a:rPr>
-              <a:t>•  Broken Access Control: la app no verifica que el usuario pueda hacer/ver lo solicitado. Característica: categoría A01, la más frecuente.</a:t>
-            </a:r>
-          </a:p>
-          <a:p>
-            <a:pPr>
-              <a:spcAft>
-                <a:spcPts val="600"/>
-              </a:spcAft>
-            </a:pPr>
-            <a:r>
-              <a:rPr sz="1500">
-                <a:solidFill>
-                  <a:srgbClr val="22282E"/>
-                </a:solidFill>
-              </a:rPr>
-              <a:t>•  IDOR: acceder a un objeto cambiando su identificador sin comprobación de permisos. Característica: fácil de detectar cambiando IDs.</a:t>
-            </a:r>
-          </a:p>
-          <a:p>
-            <a:pPr>
-              <a:spcAft>
-                <a:spcPts val="600"/>
-              </a:spcAft>
-            </a:pPr>
-            <a:r>
-              <a:rPr sz="1500">
-                <a:solidFill>
-                  <a:srgbClr val="22282E"/>
-                </a:solidFill>
-              </a:rPr>
-              <a:t>•  Autorización horizontal: acceder a datos de otro usuario del mismo nivel. Característica: IDOR típico.</a:t>
-            </a:r>
-          </a:p>
-          <a:p>
-            <a:pPr>
-              <a:spcAft>
-                <a:spcPts val="600"/>
-              </a:spcAft>
-            </a:pPr>
-            <a:r>
-              <a:rPr sz="1500">
-                <a:solidFill>
-                  <a:srgbClr val="22282E"/>
-                </a:solidFill>
-              </a:rPr>
-              <a:t>•  Autorización vertical: acceder a funciones de mayor privilegio. Característica: escalada a admin.</a:t>
-            </a:r>
-          </a:p>
-          <a:p>
-            <a:pPr>
-              <a:spcAft>
-                <a:spcPts val="600"/>
-              </a:spcAft>
-            </a:pPr>
-            <a:r>
-              <a:rPr sz="1500">
-                <a:solidFill>
-                  <a:srgbClr val="22282E"/>
-                </a:solidFill>
-              </a:rPr>
-              <a:t>•  Path traversal: usar ../ para salir del directorio permitido. Característica: lee archivos arbitrarios del servidor.</a:t>
-            </a:r>
-          </a:p>
-          <a:p>
-            <a:pPr>
-              <a:spcAft>
-                <a:spcPts val="600"/>
-              </a:spcAft>
-            </a:pPr>
-            <a:r>
-              <a:rPr sz="1500">
-                <a:solidFill>
-                  <a:srgbClr val="22282E"/>
-                </a:solidFill>
-              </a:rPr>
-              <a:t>•  Forced browsing: navegar directamente a URLs no enlazadas. Característica: revela funciones sin control de acceso.</a:t>
+              <a:t>•  El control de acceso roto es la categoría A01 de OWASP —la más extendida— porque combina</a:t>
+            </a:r>
+          </a:p>
+          <a:p>
+            <a:pPr>
+              <a:spcAft>
+                <a:spcPts val="600"/>
+              </a:spcAft>
+            </a:pPr>
+            <a:r>
+              <a:rPr sz="1500">
+                <a:solidFill>
+                  <a:srgbClr val="22282E"/>
+                </a:solidFill>
+              </a:rPr>
+              <a:t>•  altísimo impacto con explotación trivial. Autenticarse responde "¿quién eres?"; autorizar</a:t>
+            </a:r>
+          </a:p>
+          <a:p>
+            <a:pPr>
+              <a:spcAft>
+                <a:spcPts val="600"/>
+              </a:spcAft>
+            </a:pPr>
+            <a:r>
+              <a:rPr sz="1500">
+                <a:solidFill>
+                  <a:srgbClr val="22282E"/>
+                </a:solidFill>
+              </a:rPr>
+              <a:t>•  responde "¿puedes hacer esto?", y el fallo es no comprobar bien esa segunda pregunta en cada</a:t>
+            </a:r>
+          </a:p>
+          <a:p>
+            <a:pPr>
+              <a:spcAft>
+                <a:spcPts val="600"/>
+              </a:spcAft>
+            </a:pPr>
+            <a:r>
+              <a:rPr sz="1500">
+                <a:solidFill>
+                  <a:srgbClr val="22282E"/>
+                </a:solidFill>
+              </a:rPr>
+              <a:t>•  acción. La causa profunda es casi siempre la misma: confiar en que el cliente no pedirá lo que no</a:t>
+            </a:r>
+          </a:p>
+          <a:p>
+            <a:pPr>
+              <a:spcAft>
+                <a:spcPts val="600"/>
+              </a:spcAft>
+            </a:pPr>
+            <a:r>
+              <a:rPr sz="1500">
+                <a:solidFill>
+                  <a:srgbClr val="22282E"/>
+                </a:solidFill>
+              </a:rPr>
+              <a:t>•  debe, ocultando funciones o identificadores en la interfaz en lugar de verificar los permisos en el</a:t>
+            </a:r>
+          </a:p>
+          <a:p>
+            <a:pPr>
+              <a:spcAft>
+                <a:spcPts val="600"/>
+              </a:spcAft>
+            </a:pPr>
+            <a:r>
+              <a:rPr sz="1500">
+                <a:solidFill>
+                  <a:srgbClr val="22282E"/>
+                </a:solidFill>
+              </a:rPr>
+              <a:t>•  servidor. Como el atacante controla el cliente (clase 086), cualquier control que viva solo ahí es</a:t>
+            </a:r>
+          </a:p>
+          <a:p>
+            <a:pPr>
+              <a:spcAft>
+                <a:spcPts val="600"/>
+              </a:spcAft>
+            </a:pPr>
+            <a:r>
+              <a:rPr sz="1500">
+                <a:solidFill>
+                  <a:srgbClr val="22282E"/>
+                </a:solidFill>
+              </a:rPr>
+              <a:t>•  decorativo.</a:t>
             </a:r>
           </a:p>
         </p:txBody>
@@ -4241,7 +4602,7 @@
                   <a:srgbClr val="0B3D2E"/>
                 </a:solidFill>
               </a:rPr>
-              <a:t>🧰 Herramientas y preparación</a:t>
+              <a:t>📖 Definiciones y características</a:t>
             </a:r>
           </a:p>
         </p:txBody>
@@ -4279,37 +4640,82 @@
                   <a:srgbClr val="22282E"/>
                 </a:solidFill>
               </a:rPr>
-              <a:t>•  Burp (Intruder para iterar IDs; extensión Autorize para probar authz).</a:t>
-            </a:r>
-          </a:p>
-          <a:p>
-            <a:pPr>
-              <a:spcAft>
-                <a:spcPts val="600"/>
-              </a:spcAft>
-            </a:pPr>
-            <a:r>
-              <a:rPr sz="1500">
-                <a:solidFill>
-                  <a:srgbClr val="22282E"/>
-                </a:solidFill>
-              </a:rPr>
-              <a:t>•  PortSwigger labs de access control y Juice Shop.</a:t>
-            </a:r>
-          </a:p>
-          <a:p>
-            <a:pPr>
-              <a:spcAft>
-                <a:spcPts val="600"/>
-              </a:spcAft>
-            </a:pPr>
-            <a:r>
-              <a:rPr sz="1500">
-                <a:solidFill>
-                  <a:srgbClr val="22282E"/>
-                </a:solidFill>
-              </a:rPr>
-              <a:t>•  Dos cuentas de prueba (usuario A y usuario B) para comparar accesos.</a:t>
+              <a:t>•  Broken Access Control: la app no verifica que el usuario pueda hacer/ver lo solicitado. Característica: categoría A01, la más frecuente.</a:t>
+            </a:r>
+          </a:p>
+          <a:p>
+            <a:pPr>
+              <a:spcAft>
+                <a:spcPts val="600"/>
+              </a:spcAft>
+            </a:pPr>
+            <a:r>
+              <a:rPr sz="1500">
+                <a:solidFill>
+                  <a:srgbClr val="22282E"/>
+                </a:solidFill>
+              </a:rPr>
+              <a:t>•  IDOR: acceder a un objeto cambiando su identificador sin comprobación de permisos. Característica: fácil de detectar cambiando IDs.</a:t>
+            </a:r>
+          </a:p>
+          <a:p>
+            <a:pPr>
+              <a:spcAft>
+                <a:spcPts val="600"/>
+              </a:spcAft>
+            </a:pPr>
+            <a:r>
+              <a:rPr sz="1500">
+                <a:solidFill>
+                  <a:srgbClr val="22282E"/>
+                </a:solidFill>
+              </a:rPr>
+              <a:t>•  Autorización horizontal: acceder a datos de otro usuario del mismo nivel. Característica: IDOR típico.</a:t>
+            </a:r>
+          </a:p>
+          <a:p>
+            <a:pPr>
+              <a:spcAft>
+                <a:spcPts val="600"/>
+              </a:spcAft>
+            </a:pPr>
+            <a:r>
+              <a:rPr sz="1500">
+                <a:solidFill>
+                  <a:srgbClr val="22282E"/>
+                </a:solidFill>
+              </a:rPr>
+              <a:t>•  Autorización vertical: acceder a funciones de mayor privilegio. Característica: escalada a admin.</a:t>
+            </a:r>
+          </a:p>
+          <a:p>
+            <a:pPr>
+              <a:spcAft>
+                <a:spcPts val="600"/>
+              </a:spcAft>
+            </a:pPr>
+            <a:r>
+              <a:rPr sz="1500">
+                <a:solidFill>
+                  <a:srgbClr val="22282E"/>
+                </a:solidFill>
+              </a:rPr>
+              <a:t>•  Path traversal: usar ../ para salir del directorio permitido. Característica: lee archivos arbitrarios del servidor.</a:t>
+            </a:r>
+          </a:p>
+          <a:p>
+            <a:pPr>
+              <a:spcAft>
+                <a:spcPts val="600"/>
+              </a:spcAft>
+            </a:pPr>
+            <a:r>
+              <a:rPr sz="1500">
+                <a:solidFill>
+                  <a:srgbClr val="22282E"/>
+                </a:solidFill>
+              </a:rPr>
+              <a:t>•  Forced browsing: navegar directamente a URLs no enlazadas. Característica: revela funciones sin control de acceso.</a:t>
             </a:r>
           </a:p>
         </p:txBody>
@@ -4360,7 +4766,7 @@
                   <a:srgbClr val="0B3D2E"/>
                 </a:solidFill>
               </a:rPr>
-              <a:t>🧪 Laboratorio guiado</a:t>
+              <a:t>📔 Glosario</a:t>
             </a:r>
           </a:p>
         </p:txBody>
@@ -4398,97 +4804,97 @@
                   <a:srgbClr val="22282E"/>
                 </a:solidFill>
               </a:rPr>
-              <a:t>•  Autentícate como usuario A y localiza una petición con un ID (/api/orders/1001).</a:t>
-            </a:r>
-          </a:p>
-          <a:p>
-            <a:pPr>
-              <a:spcAft>
-                <a:spcPts val="600"/>
-              </a:spcAft>
-            </a:pPr>
-            <a:r>
-              <a:rPr sz="1500">
-                <a:solidFill>
-                  <a:srgbClr val="22282E"/>
-                </a:solidFill>
-              </a:rPr>
-              <a:t>•  Cambia el ID a 1002 y observa si accedes a datos de otro usuario (IDOR horizontal).</a:t>
-            </a:r>
-          </a:p>
-          <a:p>
-            <a:pPr>
-              <a:spcAft>
-                <a:spcPts val="600"/>
-              </a:spcAft>
-            </a:pPr>
-            <a:r>
-              <a:rPr sz="1500">
-                <a:solidFill>
-                  <a:srgbClr val="22282E"/>
-                </a:solidFill>
-              </a:rPr>
-              <a:t>•  Automatiza con Intruder para enumerar objetos accesibles.</a:t>
-            </a:r>
-          </a:p>
-          <a:p>
-            <a:pPr>
-              <a:spcAft>
-                <a:spcPts val="600"/>
-              </a:spcAft>
-            </a:pPr>
-            <a:r>
-              <a:rPr sz="1500">
-                <a:solidFill>
-                  <a:srgbClr val="22282E"/>
-                </a:solidFill>
-              </a:rPr>
-              <a:t>•  Prueba escalada vertical: accede a /admin o a endpoints de administración con tu sesión normal.</a:t>
-            </a:r>
-          </a:p>
-          <a:p>
-            <a:pPr>
-              <a:spcAft>
-                <a:spcPts val="600"/>
-              </a:spcAft>
-            </a:pPr>
-            <a:r>
-              <a:rPr sz="1500">
-                <a:solidFill>
-                  <a:srgbClr val="22282E"/>
-                </a:solidFill>
-              </a:rPr>
-              <a:t>•  Explota path traversal en un parámetro de archivo:</a:t>
-            </a:r>
-          </a:p>
-          <a:p>
-            <a:pPr>
-              <a:spcAft>
-                <a:spcPts val="600"/>
-              </a:spcAft>
-            </a:pPr>
-            <a:r>
-              <a:rPr sz="1500">
-                <a:solidFill>
-                  <a:srgbClr val="22282E"/>
-                </a:solidFill>
-              </a:rPr>
-              <a:t>•  GET /download?file=../../../../etc/passwd</a:t>
-            </a:r>
-          </a:p>
-          <a:p>
-            <a:pPr>
-              <a:spcAft>
-                <a:spcPts val="600"/>
-              </a:spcAft>
-            </a:pPr>
-            <a:r>
-              <a:rPr sz="1500">
-                <a:solidFill>
-                  <a:srgbClr val="22282E"/>
-                </a:solidFill>
-              </a:rPr>
-              <a:t>•  Prueba variantes de evasión: encoding (%2e%2e%2f), doble encoding, prefijos absolutos.</a:t>
+              <a:t>•  Término — Definición concisa</a:t>
+            </a:r>
+          </a:p>
+          <a:p>
+            <a:pPr>
+              <a:spcAft>
+                <a:spcPts val="600"/>
+              </a:spcAft>
+            </a:pPr>
+            <a:r>
+              <a:rPr sz="1500">
+                <a:solidFill>
+                  <a:srgbClr val="22282E"/>
+                </a:solidFill>
+              </a:rPr>
+              <a:t>•  Control de acceso roto — No verificar bien los permisos; A01 de OWASP</a:t>
+            </a:r>
+          </a:p>
+          <a:p>
+            <a:pPr>
+              <a:spcAft>
+                <a:spcPts val="600"/>
+              </a:spcAft>
+            </a:pPr>
+            <a:r>
+              <a:rPr sz="1500">
+                <a:solidFill>
+                  <a:srgbClr val="22282E"/>
+                </a:solidFill>
+              </a:rPr>
+              <a:t>•  Autorización — Comprobar si una identidad puede hacer una acción</a:t>
+            </a:r>
+          </a:p>
+          <a:p>
+            <a:pPr>
+              <a:spcAft>
+                <a:spcPts val="600"/>
+              </a:spcAft>
+            </a:pPr>
+            <a:r>
+              <a:rPr sz="1500">
+                <a:solidFill>
+                  <a:srgbClr val="22282E"/>
+                </a:solidFill>
+              </a:rPr>
+              <a:t>•  Escalada horizontal — Acceder a datos de otro usuario del mismo nivel</a:t>
+            </a:r>
+          </a:p>
+          <a:p>
+            <a:pPr>
+              <a:spcAft>
+                <a:spcPts val="600"/>
+              </a:spcAft>
+            </a:pPr>
+            <a:r>
+              <a:rPr sz="1500">
+                <a:solidFill>
+                  <a:srgbClr val="22282E"/>
+                </a:solidFill>
+              </a:rPr>
+              <a:t>•  Escalada vertical — Acceder a funciones de un nivel superior</a:t>
+            </a:r>
+          </a:p>
+          <a:p>
+            <a:pPr>
+              <a:spcAft>
+                <a:spcPts val="600"/>
+              </a:spcAft>
+            </a:pPr>
+            <a:r>
+              <a:rPr sz="1500">
+                <a:solidFill>
+                  <a:srgbClr val="22282E"/>
+                </a:solidFill>
+              </a:rPr>
+              <a:t>•  IDOR — Referenciar un objeto sin comprobar la propiedad</a:t>
+            </a:r>
+          </a:p>
+          <a:p>
+            <a:pPr>
+              <a:spcAft>
+                <a:spcPts val="600"/>
+              </a:spcAft>
+            </a:pPr>
+            <a:r>
+              <a:rPr sz="1500">
+                <a:solidFill>
+                  <a:srgbClr val="22282E"/>
+                </a:solidFill>
+              </a:rPr>
+              <a:t>•  Identificador no obvio — UUID que dificulta adivinar, pero no es una defensa</a:t>
             </a:r>
           </a:p>
         </p:txBody>
@@ -4539,7 +4945,7 @@
                   <a:srgbClr val="0B3D2E"/>
                 </a:solidFill>
               </a:rPr>
-              <a:t>✍️ Ejercicios</a:t>
+              <a:t>🧰 Herramientas y preparación</a:t>
             </a:r>
           </a:p>
         </p:txBody>
@@ -4577,82 +4983,37 @@
                   <a:srgbClr val="22282E"/>
                 </a:solidFill>
               </a:rPr>
-              <a:t>•  Diferencia con ejemplos IDOR horizontal y escalada vertical.</a:t>
-            </a:r>
-          </a:p>
-          <a:p>
-            <a:pPr>
-              <a:spcAft>
-                <a:spcPts val="600"/>
-              </a:spcAft>
-            </a:pPr>
-            <a:r>
-              <a:rPr sz="1500">
-                <a:solidFill>
-                  <a:srgbClr val="22282E"/>
-                </a:solidFill>
-              </a:rPr>
-              <a:t>•  Explota un IDOR donde el identificador es un UUID (busca la fuente del UUID).</a:t>
-            </a:r>
-          </a:p>
-          <a:p>
-            <a:pPr>
-              <a:spcAft>
-                <a:spcPts val="600"/>
-              </a:spcAft>
-            </a:pPr>
-            <a:r>
-              <a:rPr sz="1500">
-                <a:solidFill>
-                  <a:srgbClr val="22282E"/>
-                </a:solidFill>
-              </a:rPr>
-              <a:t>•  Lee /etc/passwd vía path traversal evadiendo un filtro de ../.</a:t>
-            </a:r>
-          </a:p>
-          <a:p>
-            <a:pPr>
-              <a:spcAft>
-                <a:spcPts val="600"/>
-              </a:spcAft>
-            </a:pPr>
-            <a:r>
-              <a:rPr sz="1500">
-                <a:solidFill>
-                  <a:srgbClr val="22282E"/>
-                </a:solidFill>
-              </a:rPr>
-              <a:t>•  Descubre una función admin por forced browsing.</a:t>
-            </a:r>
-          </a:p>
-          <a:p>
-            <a:pPr>
-              <a:spcAft>
-                <a:spcPts val="600"/>
-              </a:spcAft>
-            </a:pPr>
-            <a:r>
-              <a:rPr sz="1500">
-                <a:solidFill>
-                  <a:srgbClr val="22282E"/>
-                </a:solidFill>
-              </a:rPr>
-              <a:t>•  Prueba cambiar el verbo HTTP (GET→POST/PUT) para saltar un control.</a:t>
-            </a:r>
-          </a:p>
-          <a:p>
-            <a:pPr>
-              <a:spcAft>
-                <a:spcPts val="600"/>
-              </a:spcAft>
-            </a:pPr>
-            <a:r>
-              <a:rPr sz="1500">
-                <a:solidFill>
-                  <a:srgbClr val="22282E"/>
-                </a:solidFill>
-              </a:rPr>
-              <a:t>•  Escribe el control de acceso correcto a nivel de objeto (comprobar propietario).</a:t>
+              <a:t>•  Burp (Intruder para iterar IDs; extensión Autorize para probar authz).</a:t>
+            </a:r>
+          </a:p>
+          <a:p>
+            <a:pPr>
+              <a:spcAft>
+                <a:spcPts val="600"/>
+              </a:spcAft>
+            </a:pPr>
+            <a:r>
+              <a:rPr sz="1500">
+                <a:solidFill>
+                  <a:srgbClr val="22282E"/>
+                </a:solidFill>
+              </a:rPr>
+              <a:t>•  PortSwigger labs de access control y Juice Shop.</a:t>
+            </a:r>
+          </a:p>
+          <a:p>
+            <a:pPr>
+              <a:spcAft>
+                <a:spcPts val="600"/>
+              </a:spcAft>
+            </a:pPr>
+            <a:r>
+              <a:rPr sz="1500">
+                <a:solidFill>
+                  <a:srgbClr val="22282E"/>
+                </a:solidFill>
+              </a:rPr>
+              <a:t>•  Dos cuentas de prueba (usuario A y usuario B) para comparar accesos.</a:t>
             </a:r>
           </a:p>
         </p:txBody>
@@ -4703,7 +5064,7 @@
                   <a:srgbClr val="0B3D2E"/>
                 </a:solidFill>
               </a:rPr>
-              <a:t>📝 Reto verificable</a:t>
+              <a:t>🧪 Laboratorio guiado</a:t>
             </a:r>
           </a:p>
         </p:txBody>
@@ -4741,22 +5102,97 @@
                   <a:srgbClr val="22282E"/>
                 </a:solidFill>
               </a:rPr>
-              <a:t>•  Resuelve dos labs de PortSwigger: un IDOR que exponga datos de otro usuario y un path traversal que lea un archivo del sistema.</a:t>
-            </a:r>
-          </a:p>
-          <a:p>
-            <a:pPr>
-              <a:spcAft>
-                <a:spcPts val="600"/>
-              </a:spcAft>
-            </a:pPr>
-            <a:r>
-              <a:rPr sz="1500">
-                <a:solidFill>
-                  <a:srgbClr val="22282E"/>
-                </a:solidFill>
-              </a:rPr>
-              <a:t>•  Criterio de aceptación: ambos labs quedan resueltos, documentas el identificador/ruta manipulados, la evidencia del acceso no autorizado y la defensa (authz por objeto, canonicalización de rutas).</a:t>
+              <a:t>•  Autentícate como usuario A y localiza una petición con un ID (/api/orders/1001).</a:t>
+            </a:r>
+          </a:p>
+          <a:p>
+            <a:pPr>
+              <a:spcAft>
+                <a:spcPts val="600"/>
+              </a:spcAft>
+            </a:pPr>
+            <a:r>
+              <a:rPr sz="1500">
+                <a:solidFill>
+                  <a:srgbClr val="22282E"/>
+                </a:solidFill>
+              </a:rPr>
+              <a:t>•  Cambia el ID a 1002 y observa si accedes a datos de otro usuario (IDOR horizontal).</a:t>
+            </a:r>
+          </a:p>
+          <a:p>
+            <a:pPr>
+              <a:spcAft>
+                <a:spcPts val="600"/>
+              </a:spcAft>
+            </a:pPr>
+            <a:r>
+              <a:rPr sz="1500">
+                <a:solidFill>
+                  <a:srgbClr val="22282E"/>
+                </a:solidFill>
+              </a:rPr>
+              <a:t>•  Automatiza con Intruder para enumerar objetos accesibles.</a:t>
+            </a:r>
+          </a:p>
+          <a:p>
+            <a:pPr>
+              <a:spcAft>
+                <a:spcPts val="600"/>
+              </a:spcAft>
+            </a:pPr>
+            <a:r>
+              <a:rPr sz="1500">
+                <a:solidFill>
+                  <a:srgbClr val="22282E"/>
+                </a:solidFill>
+              </a:rPr>
+              <a:t>•  Prueba escalada vertical: accede a /admin o a endpoints de administración con tu sesión normal.</a:t>
+            </a:r>
+          </a:p>
+          <a:p>
+            <a:pPr>
+              <a:spcAft>
+                <a:spcPts val="600"/>
+              </a:spcAft>
+            </a:pPr>
+            <a:r>
+              <a:rPr sz="1500">
+                <a:solidFill>
+                  <a:srgbClr val="22282E"/>
+                </a:solidFill>
+              </a:rPr>
+              <a:t>•  Explota path traversal en un parámetro de archivo:</a:t>
+            </a:r>
+          </a:p>
+          <a:p>
+            <a:pPr>
+              <a:spcAft>
+                <a:spcPts val="600"/>
+              </a:spcAft>
+            </a:pPr>
+            <a:r>
+              <a:rPr sz="1500">
+                <a:solidFill>
+                  <a:srgbClr val="22282E"/>
+                </a:solidFill>
+              </a:rPr>
+              <a:t>•  Prueba variantes de evasión: encoding (%2e%2e%2f), doble encoding, prefijos absolutos.</a:t>
+            </a:r>
+          </a:p>
+          <a:p>
+            <a:pPr>
+              <a:spcAft>
+                <a:spcPts val="600"/>
+              </a:spcAft>
+            </a:pPr>
+            <a:r>
+              <a:rPr sz="1500">
+                <a:solidFill>
+                  <a:srgbClr val="22282E"/>
+                </a:solidFill>
+              </a:rPr>
+              <a:t>•  Usa la extensión Autorize para detectar automáticamente endpoints sin control de acceso.</a:t>
             </a:r>
           </a:p>
         </p:txBody>
